--- a/classes/parte-1-machine-learning-clasico/068-analisis-de-errores/clase-068-analisis-de-errores-presentacion.pptx
+++ b/classes/parte-1-machine-learning-clasico/068-analisis-de-errores/clase-068-analisis-de-errores-presentacion.pptx
@@ -4933,7 +4933,7 @@
                 </a:solidFill>
                 <a:latin typeface="Segoe UI"/>
               </a:rPr>
-              <a:t>Primer bloque ejecutable del notebook.</a:t>
+              <a:t>Dejamos de mirar el accuracy global y auditamos dónde se equivoca el clasificador: matriz de confusión normalizada por fila, pares de clases confundidas, inspección visual de errores y análisis por slices como puerta al data-centric AI. Requiere: numpy, scikit-learn, matplotlib.</a:t>
             </a:r>
           </a:p>
         </p:txBody>
@@ -5020,7 +5020,235 @@
                 </a:solidFill>
                 <a:latin typeface="Courier New"/>
               </a:rPr>
-              <a:t># Imports y configuración inicial</a:t>
+              <a:t>import numpy as np</a:t>
+            </a:r>
+          </a:p>
+          <a:p>
+            <a:pPr>
+              <a:defRPr sz="1200" b="0">
+                <a:solidFill>
+                  <a:srgbClr val="F8FAFC"/>
+                </a:solidFill>
+                <a:latin typeface="Courier New"/>
+              </a:defRPr>
+            </a:pPr>
+            <a:r>
+              <a:rPr sz="1200" b="0">
+                <a:solidFill>
+                  <a:srgbClr val="F8FAFC"/>
+                </a:solidFill>
+                <a:latin typeface="Courier New"/>
+              </a:rPr>
+              <a:t>import matplotlib.pyplot as plt</a:t>
+            </a:r>
+          </a:p>
+          <a:p>
+            <a:pPr>
+              <a:defRPr sz="1200" b="0">
+                <a:solidFill>
+                  <a:srgbClr val="F8FAFC"/>
+                </a:solidFill>
+                <a:latin typeface="Courier New"/>
+              </a:defRPr>
+            </a:pPr>
+            <a:r>
+              <a:rPr sz="1200" b="0">
+                <a:solidFill>
+                  <a:srgbClr val="F8FAFC"/>
+                </a:solidFill>
+                <a:latin typeface="Courier New"/>
+              </a:rPr>
+              <a:t>from sklearn.datasets import load_digits</a:t>
+            </a:r>
+          </a:p>
+          <a:p>
+            <a:pPr>
+              <a:defRPr sz="1200" b="0">
+                <a:solidFill>
+                  <a:srgbClr val="F8FAFC"/>
+                </a:solidFill>
+                <a:latin typeface="Courier New"/>
+              </a:defRPr>
+            </a:pPr>
+            <a:r>
+              <a:rPr sz="1200" b="0">
+                <a:solidFill>
+                  <a:srgbClr val="F8FAFC"/>
+                </a:solidFill>
+                <a:latin typeface="Courier New"/>
+              </a:rPr>
+              <a:t>from sklearn.linear_model import SGDClassifier</a:t>
+            </a:r>
+          </a:p>
+          <a:p>
+            <a:pPr>
+              <a:defRPr sz="1200" b="0">
+                <a:solidFill>
+                  <a:srgbClr val="F8FAFC"/>
+                </a:solidFill>
+                <a:latin typeface="Courier New"/>
+              </a:defRPr>
+            </a:pPr>
+            <a:r>
+              <a:rPr sz="1200" b="0">
+                <a:solidFill>
+                  <a:srgbClr val="F8FAFC"/>
+                </a:solidFill>
+                <a:latin typeface="Courier New"/>
+              </a:rPr>
+              <a:t>from sklearn.model_selection import train_test_split, cross_val_predict</a:t>
+            </a:r>
+          </a:p>
+          <a:p>
+            <a:pPr>
+              <a:defRPr sz="1200" b="0">
+                <a:solidFill>
+                  <a:srgbClr val="F8FAFC"/>
+                </a:solidFill>
+                <a:latin typeface="Courier New"/>
+              </a:defRPr>
+            </a:pPr>
+            <a:r>
+              <a:rPr sz="1200" b="0">
+                <a:solidFill>
+                  <a:srgbClr val="F8FAFC"/>
+                </a:solidFill>
+                <a:latin typeface="Courier New"/>
+              </a:rPr>
+              <a:t>from sklearn.metrics import confusion_matrix, accuracy_score</a:t>
+            </a:r>
+          </a:p>
+          <a:p>
+            <a:pPr>
+              <a:defRPr sz="1200" b="0">
+                <a:solidFill>
+                  <a:srgbClr val="F8FAFC"/>
+                </a:solidFill>
+                <a:latin typeface="Courier New"/>
+              </a:defRPr>
+            </a:pPr>
+            <a:r>
+              <a:rPr sz="1200" b="0">
+                <a:solidFill>
+                  <a:srgbClr val="F8FAFC"/>
+                </a:solidFill>
+                <a:latin typeface="Courier New"/>
+              </a:rPr>
+              <a:t> </a:t>
+            </a:r>
+          </a:p>
+          <a:p>
+            <a:pPr>
+              <a:defRPr sz="1200" b="0">
+                <a:solidFill>
+                  <a:srgbClr val="F8FAFC"/>
+                </a:solidFill>
+                <a:latin typeface="Courier New"/>
+              </a:defRPr>
+            </a:pPr>
+            <a:r>
+              <a:rPr sz="1200" b="0">
+                <a:solidFill>
+                  <a:srgbClr val="F8FAFC"/>
+                </a:solidFill>
+                <a:latin typeface="Courier New"/>
+              </a:rPr>
+              <a:t>np.random.seed(42)</a:t>
+            </a:r>
+          </a:p>
+          <a:p>
+            <a:pPr>
+              <a:defRPr sz="1200" b="0">
+                <a:solidFill>
+                  <a:srgbClr val="F8FAFC"/>
+                </a:solidFill>
+                <a:latin typeface="Courier New"/>
+              </a:defRPr>
+            </a:pPr>
+            <a:r>
+              <a:rPr sz="1200" b="0">
+                <a:solidFill>
+                  <a:srgbClr val="F8FAFC"/>
+                </a:solidFill>
+                <a:latin typeface="Courier New"/>
+              </a:rPr>
+              <a:t> </a:t>
+            </a:r>
+          </a:p>
+          <a:p>
+            <a:pPr>
+              <a:defRPr sz="1200" b="0">
+                <a:solidFill>
+                  <a:srgbClr val="F8FAFC"/>
+                </a:solidFill>
+                <a:latin typeface="Courier New"/>
+              </a:defRPr>
+            </a:pPr>
+            <a:r>
+              <a:rPr sz="1200" b="0">
+                <a:solidFill>
+                  <a:srgbClr val="F8FAFC"/>
+                </a:solidFill>
+                <a:latin typeface="Courier New"/>
+              </a:rPr>
+              <a:t>digits = load_digits()</a:t>
+            </a:r>
+          </a:p>
+          <a:p>
+            <a:pPr>
+              <a:defRPr sz="1200" b="0">
+                <a:solidFill>
+                  <a:srgbClr val="F8FAFC"/>
+                </a:solidFill>
+                <a:latin typeface="Courier New"/>
+              </a:defRPr>
+            </a:pPr>
+            <a:r>
+              <a:rPr sz="1200" b="0">
+                <a:solidFill>
+                  <a:srgbClr val="F8FAFC"/>
+                </a:solidFill>
+                <a:latin typeface="Courier New"/>
+              </a:rPr>
+              <a:t>X, y = digits.data, digits.target</a:t>
+            </a:r>
+          </a:p>
+          <a:p>
+            <a:pPr>
+              <a:defRPr sz="1200" b="0">
+                <a:solidFill>
+                  <a:srgbClr val="F8FAFC"/>
+                </a:solidFill>
+                <a:latin typeface="Courier New"/>
+              </a:defRPr>
+            </a:pPr>
+            <a:r>
+              <a:rPr sz="1200" b="0">
+                <a:solidFill>
+                  <a:srgbClr val="F8FAFC"/>
+                </a:solidFill>
+                <a:latin typeface="Courier New"/>
+              </a:rPr>
+              <a:t>Xtr, Xte, ytr, yte = train_test_split(X, y, test_size=0.3, stratify=y, random_state=42)</a:t>
+            </a:r>
+          </a:p>
+          <a:p>
+            <a:pPr>
+              <a:defRPr sz="1200" b="0">
+                <a:solidFill>
+                  <a:srgbClr val="F8FAFC"/>
+                </a:solidFill>
+                <a:latin typeface="Courier New"/>
+              </a:defRPr>
+            </a:pPr>
+            <a:r>
+              <a:rPr sz="1200" b="0">
+                <a:solidFill>
+                  <a:srgbClr val="F8FAFC"/>
+                </a:solidFill>
+                <a:latin typeface="Courier New"/>
+              </a:rPr>
+              <a:t>print('train', Xtr.shape, '| test', Xte.shape)</a:t>
             </a:r>
           </a:p>
         </p:txBody>

--- a/classes/parte-1-machine-learning-clasico/068-analisis-de-errores/clase-068-analisis-de-errores-presentacion.pptx
+++ b/classes/parte-1-machine-learning-clasico/068-analisis-de-errores/clase-068-analisis-de-errores-presentacion.pptx
@@ -3272,7 +3272,7 @@
                 </a:solidFill>
                 <a:latin typeface="Segoe UI"/>
               </a:rPr>
-              <a:t>Parte: 1 — Machine Learning Clásico · Fuente: Géron, cap. 3 § Error Analysis.  Duración estimada: 60 min.</a:t>
+              <a:t>Parte: 1 — Machine Learning Clásico · Fuente: Géron, cap. 3 § Error Analysis.  Duración estimada: 60 min. · Nivel: Intermedio</a:t>
             </a:r>
           </a:p>
         </p:txBody>
@@ -3581,7 +3581,7 @@
                 </a:solidFill>
                 <a:latin typeface="Segoe UI"/>
               </a:rPr>
-              <a:t>Parte: 1 — Machine Learning Clásico · Fuente: Géron, cap. 3 § Error Analysis.  Duración estimada: 60 min.</a:t>
+              <a:t>Parte: 1 — Machine Learning Clásico · Fuente: Géron, cap. 3 § Error Analysis.  Duración estimada: 60 min. · Nivel: Intermedio</a:t>
             </a:r>
           </a:p>
         </p:txBody>
